--- a/data/Марафон_добрых_дел_для_участников.pptx
+++ b/data/Марафон_добрых_дел_для_участников.pptx
@@ -5116,6 +5116,25 @@
               <a:t>Выберите свою команду из списка.</a:t>
             </a:r>
           </a:p>
+          <a:p>
+            <a:pPr algn="l">
+              <a:lnSpc>
+                <a:spcPct val="115000"/>
+              </a:lnSpc>
+              <a:spcBef>
+                <a:spcPts val="1600"/>
+              </a:spcBef>
+            </a:pPr>
+            <a:r>
+              <a:rPr sz="1700" b="0">
+                <a:solidFill>
+                  <a:srgbClr val="FFFFFF"/>
+                </a:solidFill>
+                <a:latin typeface="Segoe UI"/>
+              </a:rPr>
+              <a:t>Пришли по ссылке-приглашению от коллеги? Команда уже выбрана — шагов всего два.</a:t>
+            </a:r>
+          </a:p>
         </p:txBody>
       </p:sp>
       <p:sp>
@@ -5731,9 +5750,97 @@
           </a:p>
         </p:txBody>
       </p:sp>
+      <p:sp>
+        <p:nvSpPr>
+          <p:cNvPr id="4" name="Rounded Rectangle 3"/>
+          <p:cNvSpPr/>
+          <p:nvPr/>
+        </p:nvSpPr>
+        <p:spPr>
+          <a:xfrm>
+            <a:off x="822960" y="5486400"/>
+            <a:ext cx="5669280" cy="868680"/>
+          </a:xfrm>
+          <a:prstGeom prst="roundRect">
+            <a:avLst>
+              <a:gd name="adj" fmla="val 6000"/>
+            </a:avLst>
+          </a:prstGeom>
+          <a:solidFill>
+            <a:srgbClr val="1E2C3A"/>
+          </a:solidFill>
+          <a:ln>
+            <a:noFill/>
+          </a:ln>
+          <a:effectLst/>
+        </p:spPr>
+        <p:style>
+          <a:lnRef idx="1">
+            <a:schemeClr val="accent1"/>
+          </a:lnRef>
+          <a:fillRef idx="3">
+            <a:schemeClr val="accent1"/>
+          </a:fillRef>
+          <a:effectRef idx="2">
+            <a:schemeClr val="accent1"/>
+          </a:effectRef>
+          <a:fontRef idx="minor">
+            <a:schemeClr val="lt1"/>
+          </a:fontRef>
+        </p:style>
+        <p:txBody>
+          <a:bodyPr rtlCol="0" anchor="ctr"/>
+          <a:lstStyle/>
+          <a:p>
+            <a:pPr algn="ctr"/>
+          </a:p>
+        </p:txBody>
+      </p:sp>
+      <p:sp>
+        <p:nvSpPr>
+          <p:cNvPr id="5" name="TextBox 4"/>
+          <p:cNvSpPr txBox="1"/>
+          <p:nvPr/>
+        </p:nvSpPr>
+        <p:spPr>
+          <a:xfrm>
+            <a:off x="1051560" y="5669280"/>
+            <a:ext cx="5212080" cy="640080"/>
+          </a:xfrm>
+          <a:prstGeom prst="rect">
+            <a:avLst/>
+          </a:prstGeom>
+          <a:noFill/>
+        </p:spPr>
+        <p:txBody>
+          <a:bodyPr wrap="square" lIns="0" rIns="0" tIns="0" bIns="0">
+            <a:spAutoFit/>
+          </a:bodyPr>
+          <a:lstStyle/>
+          <a:p>
+            <a:pPr algn="l">
+              <a:lnSpc>
+                <a:spcPct val="115000"/>
+              </a:lnSpc>
+              <a:spcBef>
+                <a:spcPts val="0"/>
+              </a:spcBef>
+            </a:pPr>
+            <a:r>
+              <a:rPr sz="1400" b="0">
+                <a:solidFill>
+                  <a:srgbClr val="94A7B8"/>
+                </a:solidFill>
+                <a:latin typeface="Segoe UI"/>
+              </a:rPr>
+              <a:t>«Моя команда» → «Пригласить в команду» — ссылка, по которой коллега попадёт именно в вашу команду и зарегистрируется в два шага.</a:t>
+            </a:r>
+          </a:p>
+        </p:txBody>
+      </p:sp>
       <p:pic>
         <p:nvPicPr>
-          <p:cNvPr id="4" name="Picture 3" descr="06_menu.png"/>
+          <p:cNvPr id="6" name="Picture 5" descr="06_menu.png"/>
           <p:cNvPicPr>
             <a:picLocks noChangeAspect="1"/>
           </p:cNvPicPr>
@@ -5757,7 +5864,7 @@
       </p:pic>
       <p:pic>
         <p:nvPicPr>
-          <p:cNvPr id="5" name="Picture 4" descr="13_rating.png"/>
+          <p:cNvPr id="7" name="Picture 6" descr="13_rating.png"/>
           <p:cNvPicPr>
             <a:picLocks noChangeAspect="1"/>
           </p:cNvPicPr>

--- a/data/Марафон_добрых_дел_для_участников.pptx
+++ b/data/Марафон_добрых_дел_для_участников.pptx
@@ -4466,7 +4466,7 @@
                 </a:solidFill>
                 <a:latin typeface="Segoe UI"/>
               </a:rPr>
-              <a:t>1400 баллов за неделю</a:t>
+              <a:t>10.09 — 13.09 · 1400 баллов</a:t>
             </a:r>
           </a:p>
           <a:p>
@@ -4649,7 +4649,7 @@
                 </a:solidFill>
                 <a:latin typeface="Segoe UI"/>
               </a:rPr>
-              <a:t>1400 баллов за неделю</a:t>
+              <a:t>14.09 — 20.09 · 1400 баллов</a:t>
             </a:r>
           </a:p>
           <a:p>
@@ -4832,7 +4832,7 @@
                 </a:solidFill>
                 <a:latin typeface="Segoe UI"/>
               </a:rPr>
-              <a:t>1700 баллов за неделю</a:t>
+              <a:t>21.09 — 27.09 · 1700 баллов</a:t>
             </a:r>
           </a:p>
           <a:p>

--- a/data/Марафон_добрых_дел_для_участников.pptx
+++ b/data/Марафон_добрых_дел_для_участников.pptx
@@ -3220,8 +3220,8 @@
         </p:blipFill>
         <p:spPr>
           <a:xfrm>
-            <a:off x="7955279" y="1021080"/>
-            <a:ext cx="3657600" cy="4815840"/>
+            <a:off x="7955279" y="878840"/>
+            <a:ext cx="3657600" cy="5100320"/>
           </a:xfrm>
           <a:prstGeom prst="rect">
             <a:avLst/>
@@ -4466,7 +4466,7 @@
                 </a:solidFill>
                 <a:latin typeface="Segoe UI"/>
               </a:rPr>
-              <a:t>10.09 — 13.09 · 1400 баллов</a:t>
+              <a:t>10.09 — 16.09 · 1400 баллов</a:t>
             </a:r>
           </a:p>
           <a:p>
@@ -4649,7 +4649,7 @@
                 </a:solidFill>
                 <a:latin typeface="Segoe UI"/>
               </a:rPr>
-              <a:t>14.09 — 20.09 · 1400 баллов</a:t>
+              <a:t>17.09 — 23.09 · 1400 баллов</a:t>
             </a:r>
           </a:p>
           <a:p>
@@ -4832,7 +4832,7 @@
                 </a:solidFill>
                 <a:latin typeface="Segoe UI"/>
               </a:rPr>
-              <a:t>21.09 — 27.09 · 1700 баллов</a:t>
+              <a:t>24.09 — 30.09 · 1700 баллов</a:t>
             </a:r>
           </a:p>
           <a:p>
@@ -5494,8 +5494,8 @@
         </p:blipFill>
         <p:spPr>
           <a:xfrm>
-            <a:off x="6812280" y="2450888"/>
-            <a:ext cx="2445280" cy="1956224"/>
+            <a:off x="6812280" y="2407994"/>
+            <a:ext cx="2552513" cy="2042011"/>
           </a:xfrm>
           <a:prstGeom prst="rect">
             <a:avLst/>
@@ -5518,8 +5518,8 @@
         </p:blipFill>
         <p:spPr>
           <a:xfrm>
-            <a:off x="9486160" y="2450888"/>
-            <a:ext cx="2355319" cy="1956224"/>
+            <a:off x="9593393" y="2407994"/>
+            <a:ext cx="2248085" cy="2042011"/>
           </a:xfrm>
           <a:prstGeom prst="rect">
             <a:avLst/>
@@ -5854,8 +5854,8 @@
         </p:blipFill>
         <p:spPr>
           <a:xfrm>
-            <a:off x="6812281" y="2326335"/>
-            <a:ext cx="1674934" cy="2205330"/>
+            <a:off x="6812280" y="2304450"/>
+            <a:ext cx="1612899" cy="2249099"/>
           </a:xfrm>
           <a:prstGeom prst="rect">
             <a:avLst/>
@@ -5878,8 +5878,8 @@
         </p:blipFill>
         <p:spPr>
           <a:xfrm>
-            <a:off x="8715815" y="2326335"/>
-            <a:ext cx="3125664" cy="2205330"/>
+            <a:off x="8653779" y="2304450"/>
+            <a:ext cx="3187699" cy="2249099"/>
           </a:xfrm>
           <a:prstGeom prst="rect">
             <a:avLst/>

--- a/data/Марафон_добрых_дел_для_участников.pptx
+++ b/data/Марафон_добрых_дел_для_участников.pptx
@@ -6195,8 +6195,8 @@
         </p:blipFill>
         <p:spPr>
           <a:xfrm>
-            <a:off x="6812280" y="1309651"/>
-            <a:ext cx="2128216" cy="4238697"/>
+            <a:off x="6812280" y="1287665"/>
+            <a:ext cx="2100492" cy="4282670"/>
           </a:xfrm>
           <a:prstGeom prst="rect">
             <a:avLst/>
@@ -6219,8 +6219,8 @@
         </p:blipFill>
         <p:spPr>
           <a:xfrm>
-            <a:off x="9169096" y="1309651"/>
-            <a:ext cx="2672383" cy="4238697"/>
+            <a:off x="9141372" y="1287665"/>
+            <a:ext cx="2700107" cy="4282670"/>
           </a:xfrm>
           <a:prstGeom prst="rect">
             <a:avLst/>

--- a/data/Марафон_добрых_дел_для_участников.pptx
+++ b/data/Марафон_добрых_дел_для_участников.pptx
@@ -15,6 +15,7 @@
     <p:sldId id="263" r:id="rId14"/>
     <p:sldId id="264" r:id="rId15"/>
     <p:sldId id="265" r:id="rId16"/>
+    <p:sldId id="266" r:id="rId17"/>
   </p:sldIdLst>
   <p:sldSz cx="12191695" cy="6858000" type="screen4x3"/>
   <p:notesSz cx="6858000" cy="9144000"/>
@@ -3262,8 +3263,8 @@
         </p:nvSpPr>
         <p:spPr>
           <a:xfrm>
-            <a:off x="822960" y="1280160"/>
-            <a:ext cx="6583680" cy="4114800"/>
+            <a:off x="822960" y="566928"/>
+            <a:ext cx="5852160" cy="1463040"/>
           </a:xfrm>
           <a:prstGeom prst="rect">
             <a:avLst/>
@@ -3285,6 +3286,259 @@
               </a:spcBef>
             </a:pPr>
             <a:r>
+              <a:rPr sz="1500" b="1">
+                <a:solidFill>
+                  <a:srgbClr val="5EA9EE"/>
+                </a:solidFill>
+                <a:latin typeface="Segoe UI"/>
+              </a:rPr>
+              <a:t>ШАГ 6 · БАЛЛЫ</a:t>
+            </a:r>
+          </a:p>
+          <a:p>
+            <a:pPr algn="l">
+              <a:lnSpc>
+                <a:spcPct val="115000"/>
+              </a:lnSpc>
+              <a:spcBef>
+                <a:spcPts val="400"/>
+              </a:spcBef>
+            </a:pPr>
+            <a:r>
+              <a:rPr sz="3600" b="1">
+                <a:solidFill>
+                  <a:srgbClr val="FFFFFF"/>
+                </a:solidFill>
+                <a:latin typeface="Segoe UI"/>
+              </a:rPr>
+              <a:t>Получаем результат</a:t>
+            </a:r>
+          </a:p>
+          <a:p>
+            <a:pPr algn="l">
+              <a:lnSpc>
+                <a:spcPct val="115000"/>
+              </a:lnSpc>
+              <a:spcBef>
+                <a:spcPts val="800"/>
+              </a:spcBef>
+            </a:pPr>
+            <a:r>
+              <a:rPr sz="1600" b="0">
+                <a:solidFill>
+                  <a:srgbClr val="94A7B8"/>
+                </a:solidFill>
+                <a:latin typeface="Segoe UI"/>
+              </a:rPr>
+              <a:t>Отчёт смотрит P&amp;C.</a:t>
+            </a:r>
+          </a:p>
+        </p:txBody>
+      </p:sp>
+      <p:sp>
+        <p:nvSpPr>
+          <p:cNvPr id="3" name="TextBox 2"/>
+          <p:cNvSpPr txBox="1"/>
+          <p:nvPr/>
+        </p:nvSpPr>
+        <p:spPr>
+          <a:xfrm>
+            <a:off x="822960" y="2331720"/>
+            <a:ext cx="5669280" cy="3291840"/>
+          </a:xfrm>
+          <a:prstGeom prst="rect">
+            <a:avLst/>
+          </a:prstGeom>
+          <a:noFill/>
+        </p:spPr>
+        <p:txBody>
+          <a:bodyPr wrap="square" lIns="0" rIns="0" tIns="0" bIns="0">
+            <a:spAutoFit/>
+          </a:bodyPr>
+          <a:lstStyle/>
+          <a:p>
+            <a:pPr algn="l">
+              <a:lnSpc>
+                <a:spcPct val="115000"/>
+              </a:lnSpc>
+              <a:spcBef>
+                <a:spcPts val="0"/>
+              </a:spcBef>
+            </a:pPr>
+            <a:r>
+              <a:rPr sz="1700" b="0">
+                <a:solidFill>
+                  <a:srgbClr val="FFFFFF"/>
+                </a:solidFill>
+                <a:latin typeface="Segoe UI"/>
+              </a:rPr>
+              <a:t>После отправки отчёт уходит на проверку.</a:t>
+            </a:r>
+          </a:p>
+          <a:p>
+            <a:pPr algn="l">
+              <a:lnSpc>
+                <a:spcPct val="115000"/>
+              </a:lnSpc>
+              <a:spcBef>
+                <a:spcPts val="1600"/>
+              </a:spcBef>
+            </a:pPr>
+            <a:r>
+              <a:rPr sz="1700" b="0">
+                <a:solidFill>
+                  <a:srgbClr val="FFFFFF"/>
+                </a:solidFill>
+                <a:latin typeface="Segoe UI"/>
+              </a:rPr>
+              <a:t>Если всё в порядке — баллы падают вам и команде, придёт уведомление.</a:t>
+            </a:r>
+          </a:p>
+          <a:p>
+            <a:pPr algn="l">
+              <a:lnSpc>
+                <a:spcPct val="115000"/>
+              </a:lnSpc>
+              <a:spcBef>
+                <a:spcPts val="1600"/>
+              </a:spcBef>
+            </a:pPr>
+            <a:r>
+              <a:rPr sz="1700" b="0">
+                <a:solidFill>
+                  <a:srgbClr val="FFFFFF"/>
+                </a:solidFill>
+                <a:latin typeface="Segoe UI"/>
+              </a:rPr>
+              <a:t>Если чего-то не хватило — бот объяснит, что поправить, и можно переслать.</a:t>
+            </a:r>
+          </a:p>
+          <a:p>
+            <a:pPr algn="l">
+              <a:lnSpc>
+                <a:spcPct val="115000"/>
+              </a:lnSpc>
+              <a:spcBef>
+                <a:spcPts val="1600"/>
+              </a:spcBef>
+            </a:pPr>
+            <a:r>
+              <a:rPr sz="1700" b="0">
+                <a:solidFill>
+                  <a:srgbClr val="FFFFFF"/>
+                </a:solidFill>
+                <a:latin typeface="Segoe UI"/>
+              </a:rPr>
+              <a:t>Свои баллы всегда видно в «Мой вклад», командные — в «Рейтинге».</a:t>
+            </a:r>
+          </a:p>
+        </p:txBody>
+      </p:sp>
+      <p:pic>
+        <p:nvPicPr>
+          <p:cNvPr id="4" name="Picture 3" descr="11_ready.png"/>
+          <p:cNvPicPr>
+            <a:picLocks noChangeAspect="1"/>
+          </p:cNvPicPr>
+          <p:nvPr/>
+        </p:nvPicPr>
+        <p:blipFill>
+          <a:blip r:embed="rId2"/>
+          <a:stretch>
+            <a:fillRect/>
+          </a:stretch>
+        </p:blipFill>
+        <p:spPr>
+          <a:xfrm>
+            <a:off x="6812280" y="2317539"/>
+            <a:ext cx="1650003" cy="2222921"/>
+          </a:xfrm>
+          <a:prstGeom prst="rect">
+            <a:avLst/>
+          </a:prstGeom>
+        </p:spPr>
+      </p:pic>
+      <p:pic>
+        <p:nvPicPr>
+          <p:cNvPr id="5" name="Picture 4" descr="13_rating.png"/>
+          <p:cNvPicPr>
+            <a:picLocks noChangeAspect="1"/>
+          </p:cNvPicPr>
+          <p:nvPr/>
+        </p:nvPicPr>
+        <p:blipFill>
+          <a:blip r:embed="rId3"/>
+          <a:stretch>
+            <a:fillRect/>
+          </a:stretch>
+        </p:blipFill>
+        <p:spPr>
+          <a:xfrm>
+            <a:off x="8690883" y="2317539"/>
+            <a:ext cx="3150596" cy="2222921"/>
+          </a:xfrm>
+          <a:prstGeom prst="rect">
+            <a:avLst/>
+          </a:prstGeom>
+        </p:spPr>
+      </p:pic>
+    </p:spTree>
+  </p:cSld>
+  <p:clrMapOvr>
+    <a:masterClrMapping/>
+  </p:clrMapOvr>
+</p:sld>
+</file>
+
+<file path=ppt/slides/slide11.xml><?xml version="1.0" encoding="utf-8"?>
+<p:sld xmlns:a="http://schemas.openxmlformats.org/drawingml/2006/main" xmlns:p="http://schemas.openxmlformats.org/presentationml/2006/main" xmlns:r="http://schemas.openxmlformats.org/officeDocument/2006/relationships">
+  <p:cSld>
+    <p:bg>
+      <p:bgPr>
+        <a:solidFill>
+          <a:srgbClr val="17212B"/>
+        </a:solidFill>
+        <a:effectLst/>
+      </p:bgPr>
+    </p:bg>
+    <p:spTree>
+      <p:nvGrpSpPr>
+        <p:cNvPr id="1" name=""/>
+        <p:cNvGrpSpPr/>
+        <p:nvPr/>
+      </p:nvGrpSpPr>
+      <p:grpSpPr/>
+      <p:sp>
+        <p:nvSpPr>
+          <p:cNvPr id="2" name="TextBox 1"/>
+          <p:cNvSpPr txBox="1"/>
+          <p:nvPr/>
+        </p:nvSpPr>
+        <p:spPr>
+          <a:xfrm>
+            <a:off x="822960" y="1280160"/>
+            <a:ext cx="6583680" cy="4114800"/>
+          </a:xfrm>
+          <a:prstGeom prst="rect">
+            <a:avLst/>
+          </a:prstGeom>
+          <a:noFill/>
+        </p:spPr>
+        <p:txBody>
+          <a:bodyPr wrap="square" lIns="0" rIns="0" tIns="0" bIns="0">
+            <a:spAutoFit/>
+          </a:bodyPr>
+          <a:lstStyle/>
+          <a:p>
+            <a:pPr algn="l">
+              <a:lnSpc>
+                <a:spcPct val="115000"/>
+              </a:lnSpc>
+              <a:spcBef>
+                <a:spcPts val="0"/>
+              </a:spcBef>
+            </a:pPr>
+            <a:r>
               <a:rPr sz="4000" b="1">
                 <a:solidFill>
                   <a:srgbClr val="FFFFFF"/>
@@ -3406,6 +3660,25 @@
                 <a:latin typeface="Segoe UI"/>
               </a:rPr>
               <a:t>6.  Получить баллы и следить за рейтингом</a:t>
+            </a:r>
+          </a:p>
+          <a:p>
+            <a:pPr algn="l">
+              <a:lnSpc>
+                <a:spcPct val="115000"/>
+              </a:lnSpc>
+              <a:spcBef>
+                <a:spcPts val="1200"/>
+              </a:spcBef>
+            </a:pPr>
+            <a:r>
+              <a:rPr sz="2000" b="0">
+                <a:solidFill>
+                  <a:srgbClr val="FFFFFF"/>
+                </a:solidFill>
+                <a:latin typeface="Segoe UI"/>
+              </a:rPr>
+              <a:t>7.  Побороться за призы: ТОП-10 и команда-победитель</a:t>
             </a:r>
           </a:p>
           <a:p>
@@ -4947,8 +5220,8 @@
         </p:nvSpPr>
         <p:spPr>
           <a:xfrm>
-            <a:off x="822960" y="566928"/>
-            <a:ext cx="5852160" cy="1463040"/>
+            <a:off x="822960" y="640080"/>
+            <a:ext cx="10515600" cy="914400"/>
           </a:xfrm>
           <a:prstGeom prst="rect">
             <a:avLst/>
@@ -4970,32 +5243,13 @@
               </a:spcBef>
             </a:pPr>
             <a:r>
-              <a:rPr sz="1500" b="1">
-                <a:solidFill>
-                  <a:srgbClr val="5EA9EE"/>
-                </a:solidFill>
-                <a:latin typeface="Segoe UI"/>
-              </a:rPr>
-              <a:t>ШАГ 1 · РЕГИСТРАЦИЯ</a:t>
-            </a:r>
-          </a:p>
-          <a:p>
-            <a:pPr algn="l">
-              <a:lnSpc>
-                <a:spcPct val="115000"/>
-              </a:lnSpc>
-              <a:spcBef>
-                <a:spcPts val="400"/>
-              </a:spcBef>
-            </a:pPr>
-            <a:r>
-              <a:rPr sz="3600" b="1">
+              <a:rPr sz="4000" b="1">
                 <a:solidFill>
                   <a:srgbClr val="FFFFFF"/>
                 </a:solidFill>
                 <a:latin typeface="Segoe UI"/>
               </a:rPr>
-              <a:t>Знакомимся</a:t>
+              <a:t>За что боремся</a:t>
             </a:r>
           </a:p>
           <a:p>
@@ -5014,139 +5268,21 @@
                 </a:solidFill>
                 <a:latin typeface="Segoe UI"/>
               </a:rPr>
-              <a:t>Займёт минуту, делается один раз.</a:t>
-            </a:r>
-          </a:p>
-        </p:txBody>
-      </p:sp>
-      <p:sp>
-        <p:nvSpPr>
-          <p:cNvPr id="3" name="TextBox 2"/>
-          <p:cNvSpPr txBox="1"/>
-          <p:nvPr/>
-        </p:nvSpPr>
-        <p:spPr>
-          <a:xfrm>
-            <a:off x="822960" y="2331720"/>
-            <a:ext cx="5669280" cy="3291840"/>
-          </a:xfrm>
-          <a:prstGeom prst="rect">
-            <a:avLst/>
-          </a:prstGeom>
-          <a:noFill/>
-        </p:spPr>
-        <p:txBody>
-          <a:bodyPr wrap="square" lIns="0" rIns="0" tIns="0" bIns="0">
-            <a:spAutoFit/>
-          </a:bodyPr>
-          <a:lstStyle/>
-          <a:p>
-            <a:pPr algn="l">
-              <a:lnSpc>
-                <a:spcPct val="115000"/>
-              </a:lnSpc>
-              <a:spcBef>
-                <a:spcPts val="0"/>
-              </a:spcBef>
-            </a:pPr>
-            <a:r>
-              <a:rPr sz="1700" b="0">
-                <a:solidFill>
-                  <a:srgbClr val="FFFFFF"/>
-                </a:solidFill>
-                <a:latin typeface="Segoe UI"/>
-              </a:rPr>
-              <a:t>Откройте бота и нажмите «Начать».</a:t>
-            </a:r>
-          </a:p>
-          <a:p>
-            <a:pPr algn="l">
-              <a:lnSpc>
-                <a:spcPct val="115000"/>
-              </a:lnSpc>
-              <a:spcBef>
-                <a:spcPts val="1600"/>
-              </a:spcBef>
-            </a:pPr>
-            <a:r>
-              <a:rPr sz="1700" b="0">
-                <a:solidFill>
-                  <a:srgbClr val="FFFFFF"/>
-                </a:solidFill>
-                <a:latin typeface="Segoe UI"/>
-              </a:rPr>
-              <a:t>Напишите имя и фамилию одним сообщением.</a:t>
-            </a:r>
-          </a:p>
-          <a:p>
-            <a:pPr algn="l">
-              <a:lnSpc>
-                <a:spcPct val="115000"/>
-              </a:lnSpc>
-              <a:spcBef>
-                <a:spcPts val="1600"/>
-              </a:spcBef>
-            </a:pPr>
-            <a:r>
-              <a:rPr sz="1700" b="0">
-                <a:solidFill>
-                  <a:srgbClr val="FFFFFF"/>
-                </a:solidFill>
-                <a:latin typeface="Segoe UI"/>
-              </a:rPr>
-              <a:t>Отправьте номер телефона: кнопкой «Поделиться номером» или текстом в формате +998 90 123 45 67.</a:t>
-            </a:r>
-          </a:p>
-          <a:p>
-            <a:pPr algn="l">
-              <a:lnSpc>
-                <a:spcPct val="115000"/>
-              </a:lnSpc>
-              <a:spcBef>
-                <a:spcPts val="1600"/>
-              </a:spcBef>
-            </a:pPr>
-            <a:r>
-              <a:rPr sz="1700" b="0">
-                <a:solidFill>
-                  <a:srgbClr val="FFFFFF"/>
-                </a:solidFill>
-                <a:latin typeface="Segoe UI"/>
-              </a:rPr>
-              <a:t>Выберите свою команду из списка.</a:t>
-            </a:r>
-          </a:p>
-          <a:p>
-            <a:pPr algn="l">
-              <a:lnSpc>
-                <a:spcPct val="115000"/>
-              </a:lnSpc>
-              <a:spcBef>
-                <a:spcPts val="1600"/>
-              </a:spcBef>
-            </a:pPr>
-            <a:r>
-              <a:rPr sz="1700" b="0">
-                <a:solidFill>
-                  <a:srgbClr val="FFFFFF"/>
-                </a:solidFill>
-                <a:latin typeface="Segoe UI"/>
-              </a:rPr>
-              <a:t>Пришли по ссылке-приглашению от коллеги? Команда уже выбрана — шагов всего два.</a:t>
-            </a:r>
-          </a:p>
-        </p:txBody>
-      </p:sp>
-      <p:sp>
-        <p:nvSpPr>
-          <p:cNvPr id="4" name="Rounded Rectangle 3"/>
+              <a:t>Итоги подводим после последней недели марафона.</a:t>
+            </a:r>
+          </a:p>
+        </p:txBody>
+      </p:sp>
+      <p:sp>
+        <p:nvSpPr>
+          <p:cNvPr id="3" name="Rounded Rectangle 2"/>
           <p:cNvSpPr/>
           <p:nvPr/>
         </p:nvSpPr>
         <p:spPr>
           <a:xfrm>
-            <a:off x="822960" y="5486400"/>
-            <a:ext cx="5669280" cy="868680"/>
+            <a:off x="822960" y="1965960"/>
+            <a:ext cx="5166360" cy="3840480"/>
           </a:xfrm>
           <a:prstGeom prst="roundRect">
             <a:avLst>
@@ -5185,14 +5321,14 @@
       </p:sp>
       <p:sp>
         <p:nvSpPr>
-          <p:cNvPr id="5" name="TextBox 4"/>
+          <p:cNvPr id="4" name="TextBox 3"/>
           <p:cNvSpPr txBox="1"/>
           <p:nvPr/>
         </p:nvSpPr>
         <p:spPr>
           <a:xfrm>
-            <a:off x="1051560" y="5669280"/>
-            <a:ext cx="5212080" cy="640080"/>
+            <a:off x="1143000" y="2286000"/>
+            <a:ext cx="4526280" cy="3840480"/>
           </a:xfrm>
           <a:prstGeom prst="rect">
             <a:avLst/>
@@ -5214,65 +5350,337 @@
               </a:spcBef>
             </a:pPr>
             <a:r>
-              <a:rPr sz="1400" b="0">
+              <a:rPr sz="2600" b="1">
+                <a:solidFill>
+                  <a:srgbClr val="F2B83E"/>
+                </a:solidFill>
+                <a:latin typeface="Segoe UI"/>
+              </a:rPr>
+              <a:t>Личный зачёт</a:t>
+            </a:r>
+          </a:p>
+          <a:p>
+            <a:pPr algn="l">
+              <a:lnSpc>
+                <a:spcPct val="115000"/>
+              </a:lnSpc>
+              <a:spcBef>
+                <a:spcPts val="600"/>
+              </a:spcBef>
+            </a:pPr>
+            <a:r>
+              <a:rPr sz="1500" b="0">
                 <a:solidFill>
                   <a:srgbClr val="94A7B8"/>
                 </a:solidFill>
                 <a:latin typeface="Segoe UI"/>
               </a:rPr>
-              <a:t>Кнопка «Поделиться номером» работает в мобильном Telegram. В десктопной версии просто напишите номер текстом.</a:t>
-            </a:r>
-          </a:p>
-        </p:txBody>
-      </p:sp>
-      <p:pic>
-        <p:nvPicPr>
-          <p:cNvPr id="6" name="Picture 5" descr="01_welcome.png"/>
-          <p:cNvPicPr>
-            <a:picLocks noChangeAspect="1"/>
-          </p:cNvPicPr>
+              <a:t>ТОП-10 участников с наибольшим количеством баллов</a:t>
+            </a:r>
+          </a:p>
+          <a:p>
+            <a:pPr algn="l">
+              <a:lnSpc>
+                <a:spcPct val="115000"/>
+              </a:lnSpc>
+              <a:spcBef>
+                <a:spcPts val="1600"/>
+              </a:spcBef>
+            </a:pPr>
+            <a:r>
+              <a:rPr sz="1900" b="1">
+                <a:solidFill>
+                  <a:srgbClr val="FFFFFF"/>
+                </a:solidFill>
+                <a:latin typeface="Segoe UI"/>
+              </a:rPr>
+              <a:t>Личные консультации — прокачаете себя в таких сферах:</a:t>
+            </a:r>
+          </a:p>
+          <a:p>
+            <a:pPr algn="l">
+              <a:lnSpc>
+                <a:spcPct val="115000"/>
+              </a:lnSpc>
+              <a:spcBef>
+                <a:spcPts val="1000"/>
+              </a:spcBef>
+            </a:pPr>
+            <a:r>
+              <a:rPr sz="1600" b="0">
+                <a:solidFill>
+                  <a:srgbClr val="FFFFFF"/>
+                </a:solidFill>
+                <a:latin typeface="Segoe UI"/>
+              </a:rPr>
+              <a:t>•  Психология</a:t>
+            </a:r>
+          </a:p>
+          <a:p>
+            <a:pPr algn="l">
+              <a:lnSpc>
+                <a:spcPct val="115000"/>
+              </a:lnSpc>
+              <a:spcBef>
+                <a:spcPts val="1000"/>
+              </a:spcBef>
+            </a:pPr>
+            <a:r>
+              <a:rPr sz="1600" b="0">
+                <a:solidFill>
+                  <a:srgbClr val="FFFFFF"/>
+                </a:solidFill>
+                <a:latin typeface="Segoe UI"/>
+              </a:rPr>
+              <a:t>•  Нутрициология</a:t>
+            </a:r>
+          </a:p>
+          <a:p>
+            <a:pPr algn="l">
+              <a:lnSpc>
+                <a:spcPct val="115000"/>
+              </a:lnSpc>
+              <a:spcBef>
+                <a:spcPts val="1000"/>
+              </a:spcBef>
+            </a:pPr>
+            <a:r>
+              <a:rPr sz="1600" b="0">
+                <a:solidFill>
+                  <a:srgbClr val="FFFFFF"/>
+                </a:solidFill>
+                <a:latin typeface="Segoe UI"/>
+              </a:rPr>
+              <a:t>•  Финансовая грамотность</a:t>
+            </a:r>
+          </a:p>
+          <a:p>
+            <a:pPr algn="l">
+              <a:lnSpc>
+                <a:spcPct val="115000"/>
+              </a:lnSpc>
+              <a:spcBef>
+                <a:spcPts val="1000"/>
+              </a:spcBef>
+            </a:pPr>
+            <a:r>
+              <a:rPr sz="1600" b="0">
+                <a:solidFill>
+                  <a:srgbClr val="FFFFFF"/>
+                </a:solidFill>
+                <a:latin typeface="Segoe UI"/>
+              </a:rPr>
+              <a:t>•  Гражданское право (юридическая помощь)</a:t>
+            </a:r>
+          </a:p>
+          <a:p>
+            <a:pPr algn="l">
+              <a:lnSpc>
+                <a:spcPct val="115000"/>
+              </a:lnSpc>
+              <a:spcBef>
+                <a:spcPts val="1800"/>
+              </a:spcBef>
+            </a:pPr>
+            <a:r>
+              <a:rPr sz="1300" b="0">
+                <a:solidFill>
+                  <a:srgbClr val="94A7B8"/>
+                </a:solidFill>
+                <a:latin typeface="Segoe UI"/>
+              </a:rPr>
+              <a:t>Считаются все баллы за три недели: и зачтённые дела, и корректировки P&amp;C.</a:t>
+            </a:r>
+          </a:p>
+        </p:txBody>
+      </p:sp>
+      <p:sp>
+        <p:nvSpPr>
+          <p:cNvPr id="5" name="Rounded Rectangle 4"/>
+          <p:cNvSpPr/>
           <p:nvPr/>
-        </p:nvPicPr>
-        <p:blipFill>
-          <a:blip r:embed="rId2"/>
-          <a:stretch>
-            <a:fillRect/>
-          </a:stretch>
-        </p:blipFill>
-        <p:spPr>
-          <a:xfrm>
-            <a:off x="6812281" y="2588111"/>
-            <a:ext cx="1818137" cy="1681777"/>
+        </p:nvSpPr>
+        <p:spPr>
+          <a:xfrm>
+            <a:off x="6446520" y="1965960"/>
+            <a:ext cx="5166360" cy="3840480"/>
+          </a:xfrm>
+          <a:prstGeom prst="roundRect">
+            <a:avLst>
+              <a:gd name="adj" fmla="val 6000"/>
+            </a:avLst>
+          </a:prstGeom>
+          <a:solidFill>
+            <a:srgbClr val="1E2C3A"/>
+          </a:solidFill>
+          <a:ln>
+            <a:noFill/>
+          </a:ln>
+          <a:effectLst/>
+        </p:spPr>
+        <p:style>
+          <a:lnRef idx="1">
+            <a:schemeClr val="accent1"/>
+          </a:lnRef>
+          <a:fillRef idx="3">
+            <a:schemeClr val="accent1"/>
+          </a:fillRef>
+          <a:effectRef idx="2">
+            <a:schemeClr val="accent1"/>
+          </a:effectRef>
+          <a:fontRef idx="minor">
+            <a:schemeClr val="lt1"/>
+          </a:fontRef>
+        </p:style>
+        <p:txBody>
+          <a:bodyPr rtlCol="0" anchor="ctr"/>
+          <a:lstStyle/>
+          <a:p>
+            <a:pPr algn="ctr"/>
+          </a:p>
+        </p:txBody>
+      </p:sp>
+      <p:sp>
+        <p:nvSpPr>
+          <p:cNvPr id="6" name="TextBox 5"/>
+          <p:cNvSpPr txBox="1"/>
+          <p:nvPr/>
+        </p:nvSpPr>
+        <p:spPr>
+          <a:xfrm>
+            <a:off x="6766560" y="2286000"/>
+            <a:ext cx="4526280" cy="3840480"/>
           </a:xfrm>
           <a:prstGeom prst="rect">
             <a:avLst/>
           </a:prstGeom>
-        </p:spPr>
-      </p:pic>
-      <p:pic>
-        <p:nvPicPr>
-          <p:cNvPr id="7" name="Picture 6" descr="02_reg_name.png"/>
-          <p:cNvPicPr>
-            <a:picLocks noChangeAspect="1"/>
-          </p:cNvPicPr>
+          <a:noFill/>
+        </p:spPr>
+        <p:txBody>
+          <a:bodyPr wrap="square" lIns="0" rIns="0" tIns="0" bIns="0">
+            <a:spAutoFit/>
+          </a:bodyPr>
+          <a:lstStyle/>
+          <a:p>
+            <a:pPr algn="l">
+              <a:lnSpc>
+                <a:spcPct val="115000"/>
+              </a:lnSpc>
+              <a:spcBef>
+                <a:spcPts val="0"/>
+              </a:spcBef>
+            </a:pPr>
+            <a:r>
+              <a:rPr sz="2600" b="1">
+                <a:solidFill>
+                  <a:srgbClr val="F2B83E"/>
+                </a:solidFill>
+                <a:latin typeface="Segoe UI"/>
+              </a:rPr>
+              <a:t>Командный зачёт</a:t>
+            </a:r>
+          </a:p>
+          <a:p>
+            <a:pPr algn="l">
+              <a:lnSpc>
+                <a:spcPct val="115000"/>
+              </a:lnSpc>
+              <a:spcBef>
+                <a:spcPts val="600"/>
+              </a:spcBef>
+            </a:pPr>
+            <a:r>
+              <a:rPr sz="1500" b="0">
+                <a:solidFill>
+                  <a:srgbClr val="94A7B8"/>
+                </a:solidFill>
+                <a:latin typeface="Segoe UI"/>
+              </a:rPr>
+              <a:t>Команда с наибольшим количеством набранных баллов</a:t>
+            </a:r>
+          </a:p>
+          <a:p>
+            <a:pPr algn="l">
+              <a:lnSpc>
+                <a:spcPct val="115000"/>
+              </a:lnSpc>
+              <a:spcBef>
+                <a:spcPts val="1600"/>
+              </a:spcBef>
+            </a:pPr>
+            <a:r>
+              <a:rPr sz="1900" b="1">
+                <a:solidFill>
+                  <a:srgbClr val="FFFFFF"/>
+                </a:solidFill>
+                <a:latin typeface="Segoe UI"/>
+              </a:rPr>
+              <a:t>Командный ужин за счёт компании</a:t>
+            </a:r>
+          </a:p>
+          <a:p>
+            <a:pPr algn="l">
+              <a:lnSpc>
+                <a:spcPct val="115000"/>
+              </a:lnSpc>
+              <a:spcBef>
+                <a:spcPts val="1800"/>
+              </a:spcBef>
+            </a:pPr>
+            <a:r>
+              <a:rPr sz="1300" b="0">
+                <a:solidFill>
+                  <a:srgbClr val="94A7B8"/>
+                </a:solidFill>
+                <a:latin typeface="Segoe UI"/>
+              </a:rPr>
+              <a:t>В зачёт команды идут баллы всех её участников.</a:t>
+            </a:r>
+          </a:p>
+        </p:txBody>
+      </p:sp>
+      <p:sp>
+        <p:nvSpPr>
+          <p:cNvPr id="7" name="TextBox 6"/>
+          <p:cNvSpPr txBox="1"/>
           <p:nvPr/>
-        </p:nvPicPr>
-        <p:blipFill>
-          <a:blip r:embed="rId3"/>
-          <a:stretch>
-            <a:fillRect/>
-          </a:stretch>
-        </p:blipFill>
-        <p:spPr>
-          <a:xfrm>
-            <a:off x="8859018" y="2588111"/>
-            <a:ext cx="2982461" cy="1681777"/>
+        </p:nvSpPr>
+        <p:spPr>
+          <a:xfrm>
+            <a:off x="822960" y="6035040"/>
+            <a:ext cx="10515600" cy="457200"/>
           </a:xfrm>
           <a:prstGeom prst="rect">
             <a:avLst/>
           </a:prstGeom>
-        </p:spPr>
-      </p:pic>
+          <a:noFill/>
+        </p:spPr>
+        <p:txBody>
+          <a:bodyPr wrap="square" lIns="0" rIns="0" tIns="0" bIns="0">
+            <a:spAutoFit/>
+          </a:bodyPr>
+          <a:lstStyle/>
+          <a:p>
+            <a:pPr algn="l">
+              <a:lnSpc>
+                <a:spcPct val="115000"/>
+              </a:lnSpc>
+              <a:spcBef>
+                <a:spcPts val="0"/>
+              </a:spcBef>
+            </a:pPr>
+            <a:r>
+              <a:rPr sz="1500" b="0">
+                <a:solidFill>
+                  <a:srgbClr val="94A7B8"/>
+                </a:solidFill>
+                <a:latin typeface="Segoe UI"/>
+              </a:rPr>
+              <a:t>Своё место видно в боте в любой момент — раздел «Призы».</a:t>
+            </a:r>
+          </a:p>
+        </p:txBody>
+      </p:sp>
     </p:spTree>
   </p:cSld>
   <p:clrMapOvr>
@@ -5336,7 +5744,7 @@
                 </a:solidFill>
                 <a:latin typeface="Segoe UI"/>
               </a:rPr>
-              <a:t>ШАГ 2 · ПОДТВЕРЖДЕНИЕ</a:t>
+              <a:t>ШАГ 1 · РЕГИСТРАЦИЯ</a:t>
             </a:r>
           </a:p>
           <a:p>
@@ -5355,7 +5763,7 @@
                 </a:solidFill>
                 <a:latin typeface="Segoe UI"/>
               </a:rPr>
-              <a:t>Ждём зелёный свет</a:t>
+              <a:t>Знакомимся</a:t>
             </a:r>
           </a:p>
           <a:p>
@@ -5374,7 +5782,7 @@
                 </a:solidFill>
                 <a:latin typeface="Segoe UI"/>
               </a:rPr>
-              <a:t>Заявку проверяет сотрудник P&amp;C.</a:t>
+              <a:t>Займёт минуту, делается один раз.</a:t>
             </a:r>
           </a:p>
         </p:txBody>
@@ -5416,7 +5824,7 @@
                 </a:solidFill>
                 <a:latin typeface="Segoe UI"/>
               </a:rPr>
-              <a:t>После регистрации заявка уходит на проверку.</a:t>
+              <a:t>Откройте бота и нажмите «Начать».</a:t>
             </a:r>
           </a:p>
           <a:p>
@@ -5435,7 +5843,7 @@
                 </a:solidFill>
                 <a:latin typeface="Segoe UI"/>
               </a:rPr>
-              <a:t>Бот пришлёт сообщение, когда вас подтвердят.</a:t>
+              <a:t>Напишите имя и фамилию одним сообщением.</a:t>
             </a:r>
           </a:p>
           <a:p>
@@ -5454,7 +5862,7 @@
                 </a:solidFill>
                 <a:latin typeface="Segoe UI"/>
               </a:rPr>
-              <a:t>До подтверждения задания недоступны — это нормально.</a:t>
+              <a:t>Отправьте номер телефона: кнопкой «Поделиться номером» или текстом в формате +998 90 123 45 67.</a:t>
             </a:r>
           </a:p>
           <a:p>
@@ -5473,14 +5881,121 @@
                 </a:solidFill>
                 <a:latin typeface="Segoe UI"/>
               </a:rPr>
-              <a:t>Если ждёте дольше рабочего дня — напишите в «Помощь».</a:t>
+              <a:t>Выберите свою команду из списка.</a:t>
+            </a:r>
+          </a:p>
+          <a:p>
+            <a:pPr algn="l">
+              <a:lnSpc>
+                <a:spcPct val="115000"/>
+              </a:lnSpc>
+              <a:spcBef>
+                <a:spcPts val="1600"/>
+              </a:spcBef>
+            </a:pPr>
+            <a:r>
+              <a:rPr sz="1700" b="0">
+                <a:solidFill>
+                  <a:srgbClr val="FFFFFF"/>
+                </a:solidFill>
+                <a:latin typeface="Segoe UI"/>
+              </a:rPr>
+              <a:t>Пришли по ссылке-приглашению от коллеги? Команда уже выбрана — шагов всего два.</a:t>
+            </a:r>
+          </a:p>
+        </p:txBody>
+      </p:sp>
+      <p:sp>
+        <p:nvSpPr>
+          <p:cNvPr id="4" name="Rounded Rectangle 3"/>
+          <p:cNvSpPr/>
+          <p:nvPr/>
+        </p:nvSpPr>
+        <p:spPr>
+          <a:xfrm>
+            <a:off x="822960" y="5486400"/>
+            <a:ext cx="5669280" cy="868680"/>
+          </a:xfrm>
+          <a:prstGeom prst="roundRect">
+            <a:avLst>
+              <a:gd name="adj" fmla="val 6000"/>
+            </a:avLst>
+          </a:prstGeom>
+          <a:solidFill>
+            <a:srgbClr val="1E2C3A"/>
+          </a:solidFill>
+          <a:ln>
+            <a:noFill/>
+          </a:ln>
+          <a:effectLst/>
+        </p:spPr>
+        <p:style>
+          <a:lnRef idx="1">
+            <a:schemeClr val="accent1"/>
+          </a:lnRef>
+          <a:fillRef idx="3">
+            <a:schemeClr val="accent1"/>
+          </a:fillRef>
+          <a:effectRef idx="2">
+            <a:schemeClr val="accent1"/>
+          </a:effectRef>
+          <a:fontRef idx="minor">
+            <a:schemeClr val="lt1"/>
+          </a:fontRef>
+        </p:style>
+        <p:txBody>
+          <a:bodyPr rtlCol="0" anchor="ctr"/>
+          <a:lstStyle/>
+          <a:p>
+            <a:pPr algn="ctr"/>
+          </a:p>
+        </p:txBody>
+      </p:sp>
+      <p:sp>
+        <p:nvSpPr>
+          <p:cNvPr id="5" name="TextBox 4"/>
+          <p:cNvSpPr txBox="1"/>
+          <p:nvPr/>
+        </p:nvSpPr>
+        <p:spPr>
+          <a:xfrm>
+            <a:off x="1051560" y="5669280"/>
+            <a:ext cx="5212080" cy="640080"/>
+          </a:xfrm>
+          <a:prstGeom prst="rect">
+            <a:avLst/>
+          </a:prstGeom>
+          <a:noFill/>
+        </p:spPr>
+        <p:txBody>
+          <a:bodyPr wrap="square" lIns="0" rIns="0" tIns="0" bIns="0">
+            <a:spAutoFit/>
+          </a:bodyPr>
+          <a:lstStyle/>
+          <a:p>
+            <a:pPr algn="l">
+              <a:lnSpc>
+                <a:spcPct val="115000"/>
+              </a:lnSpc>
+              <a:spcBef>
+                <a:spcPts val="0"/>
+              </a:spcBef>
+            </a:pPr>
+            <a:r>
+              <a:rPr sz="1400" b="0">
+                <a:solidFill>
+                  <a:srgbClr val="94A7B8"/>
+                </a:solidFill>
+                <a:latin typeface="Segoe UI"/>
+              </a:rPr>
+              <a:t>Кнопка «Поделиться номером» работает в мобильном Telegram. В десктопной версии просто напишите номер текстом.</a:t>
             </a:r>
           </a:p>
         </p:txBody>
       </p:sp>
       <p:pic>
         <p:nvPicPr>
-          <p:cNvPr id="4" name="Picture 3" descr="03_reg_phone.png"/>
+          <p:cNvPr id="6" name="Picture 5" descr="01_welcome.png"/>
           <p:cNvPicPr>
             <a:picLocks noChangeAspect="1"/>
           </p:cNvPicPr>
@@ -5494,8 +6009,8 @@
         </p:blipFill>
         <p:spPr>
           <a:xfrm>
-            <a:off x="6812280" y="2407994"/>
-            <a:ext cx="2552513" cy="2042011"/>
+            <a:off x="6812281" y="2588111"/>
+            <a:ext cx="1818137" cy="1681777"/>
           </a:xfrm>
           <a:prstGeom prst="rect">
             <a:avLst/>
@@ -5504,7 +6019,7 @@
       </p:pic>
       <p:pic>
         <p:nvPicPr>
-          <p:cNvPr id="5" name="Picture 4" descr="05_pending.png"/>
+          <p:cNvPr id="7" name="Picture 6" descr="02_reg_name.png"/>
           <p:cNvPicPr>
             <a:picLocks noChangeAspect="1"/>
           </p:cNvPicPr>
@@ -5518,8 +6033,8 @@
         </p:blipFill>
         <p:spPr>
           <a:xfrm>
-            <a:off x="9593393" y="2407994"/>
-            <a:ext cx="2248085" cy="2042011"/>
+            <a:off x="8859018" y="2588111"/>
+            <a:ext cx="2982461" cy="1681777"/>
           </a:xfrm>
           <a:prstGeom prst="rect">
             <a:avLst/>
@@ -5589,7 +6104,7 @@
                 </a:solidFill>
                 <a:latin typeface="Segoe UI"/>
               </a:rPr>
-              <a:t>ШАГ 3 · ГЛАВНОЕ МЕНЮ</a:t>
+              <a:t>ШАГ 2 · ПОДТВЕРЖДЕНИЕ</a:t>
             </a:r>
           </a:p>
           <a:p>
@@ -5608,7 +6123,7 @@
                 </a:solidFill>
                 <a:latin typeface="Segoe UI"/>
               </a:rPr>
-              <a:t>Ваш штаб</a:t>
+              <a:t>Ждём зелёный свет</a:t>
             </a:r>
           </a:p>
           <a:p>
@@ -5627,7 +6142,7 @@
                 </a:solidFill>
                 <a:latin typeface="Segoe UI"/>
               </a:rPr>
-              <a:t>Отсюда доступно всё.</a:t>
+              <a:t>Заявку проверяет сотрудник P&amp;C.</a:t>
             </a:r>
           </a:p>
         </p:txBody>
@@ -5669,7 +6184,7 @@
                 </a:solidFill>
                 <a:latin typeface="Segoe UI"/>
               </a:rPr>
-              <a:t>«Задания недели» — список дел текущей недели.</a:t>
+              <a:t>После регистрации заявка уходит на проверку.</a:t>
             </a:r>
           </a:p>
           <a:p>
@@ -5688,7 +6203,7 @@
                 </a:solidFill>
                 <a:latin typeface="Segoe UI"/>
               </a:rPr>
-              <a:t>«Моя команда» — состав и баллы команды.</a:t>
+              <a:t>Бот пришлёт сообщение, когда вас подтвердят.</a:t>
             </a:r>
           </a:p>
           <a:p>
@@ -5707,7 +6222,7 @@
                 </a:solidFill>
                 <a:latin typeface="Segoe UI"/>
               </a:rPr>
-              <a:t>«Мой вклад» — что вы сдали и что зачтено.</a:t>
+              <a:t>До подтверждения задания недоступны — это нормально.</a:t>
             </a:r>
           </a:p>
           <a:p>
@@ -5726,121 +6241,14 @@
                 </a:solidFill>
                 <a:latin typeface="Segoe UI"/>
               </a:rPr>
-              <a:t>«Рейтинг» — таблица команд.</a:t>
-            </a:r>
-          </a:p>
-          <a:p>
-            <a:pPr algn="l">
-              <a:lnSpc>
-                <a:spcPct val="115000"/>
-              </a:lnSpc>
-              <a:spcBef>
-                <a:spcPts val="1600"/>
-              </a:spcBef>
-            </a:pPr>
-            <a:r>
-              <a:rPr sz="1700" b="0">
-                <a:solidFill>
-                  <a:srgbClr val="FFFFFF"/>
-                </a:solidFill>
-                <a:latin typeface="Segoe UI"/>
-              </a:rPr>
-              <a:t>«Правила» и «Помощь» — если что-то непонятно.</a:t>
-            </a:r>
-          </a:p>
-        </p:txBody>
-      </p:sp>
-      <p:sp>
-        <p:nvSpPr>
-          <p:cNvPr id="4" name="Rounded Rectangle 3"/>
-          <p:cNvSpPr/>
-          <p:nvPr/>
-        </p:nvSpPr>
-        <p:spPr>
-          <a:xfrm>
-            <a:off x="822960" y="5486400"/>
-            <a:ext cx="5669280" cy="868680"/>
-          </a:xfrm>
-          <a:prstGeom prst="roundRect">
-            <a:avLst>
-              <a:gd name="adj" fmla="val 6000"/>
-            </a:avLst>
-          </a:prstGeom>
-          <a:solidFill>
-            <a:srgbClr val="1E2C3A"/>
-          </a:solidFill>
-          <a:ln>
-            <a:noFill/>
-          </a:ln>
-          <a:effectLst/>
-        </p:spPr>
-        <p:style>
-          <a:lnRef idx="1">
-            <a:schemeClr val="accent1"/>
-          </a:lnRef>
-          <a:fillRef idx="3">
-            <a:schemeClr val="accent1"/>
-          </a:fillRef>
-          <a:effectRef idx="2">
-            <a:schemeClr val="accent1"/>
-          </a:effectRef>
-          <a:fontRef idx="minor">
-            <a:schemeClr val="lt1"/>
-          </a:fontRef>
-        </p:style>
-        <p:txBody>
-          <a:bodyPr rtlCol="0" anchor="ctr"/>
-          <a:lstStyle/>
-          <a:p>
-            <a:pPr algn="ctr"/>
-          </a:p>
-        </p:txBody>
-      </p:sp>
-      <p:sp>
-        <p:nvSpPr>
-          <p:cNvPr id="5" name="TextBox 4"/>
-          <p:cNvSpPr txBox="1"/>
-          <p:nvPr/>
-        </p:nvSpPr>
-        <p:spPr>
-          <a:xfrm>
-            <a:off x="1051560" y="5669280"/>
-            <a:ext cx="5212080" cy="640080"/>
-          </a:xfrm>
-          <a:prstGeom prst="rect">
-            <a:avLst/>
-          </a:prstGeom>
-          <a:noFill/>
-        </p:spPr>
-        <p:txBody>
-          <a:bodyPr wrap="square" lIns="0" rIns="0" tIns="0" bIns="0">
-            <a:spAutoFit/>
-          </a:bodyPr>
-          <a:lstStyle/>
-          <a:p>
-            <a:pPr algn="l">
-              <a:lnSpc>
-                <a:spcPct val="115000"/>
-              </a:lnSpc>
-              <a:spcBef>
-                <a:spcPts val="0"/>
-              </a:spcBef>
-            </a:pPr>
-            <a:r>
-              <a:rPr sz="1400" b="0">
-                <a:solidFill>
-                  <a:srgbClr val="94A7B8"/>
-                </a:solidFill>
-                <a:latin typeface="Segoe UI"/>
-              </a:rPr>
-              <a:t>«Моя команда» → «Пригласить в команду» — ссылка, по которой коллега попадёт именно в вашу команду и зарегистрируется в два шага.</a:t>
+              <a:t>Если ждёте дольше рабочего дня — напишите в «Помощь».</a:t>
             </a:r>
           </a:p>
         </p:txBody>
       </p:sp>
       <p:pic>
         <p:nvPicPr>
-          <p:cNvPr id="6" name="Picture 5" descr="06_menu.png"/>
+          <p:cNvPr id="4" name="Picture 3" descr="03_reg_phone.png"/>
           <p:cNvPicPr>
             <a:picLocks noChangeAspect="1"/>
           </p:cNvPicPr>
@@ -5854,8 +6262,8 @@
         </p:blipFill>
         <p:spPr>
           <a:xfrm>
-            <a:off x="6812280" y="2304450"/>
-            <a:ext cx="1612899" cy="2249099"/>
+            <a:off x="6812280" y="2407994"/>
+            <a:ext cx="2552513" cy="2042011"/>
           </a:xfrm>
           <a:prstGeom prst="rect">
             <a:avLst/>
@@ -5864,7 +6272,7 @@
       </p:pic>
       <p:pic>
         <p:nvPicPr>
-          <p:cNvPr id="7" name="Picture 6" descr="13_rating.png"/>
+          <p:cNvPr id="5" name="Picture 4" descr="05_pending.png"/>
           <p:cNvPicPr>
             <a:picLocks noChangeAspect="1"/>
           </p:cNvPicPr>
@@ -5878,8 +6286,8 @@
         </p:blipFill>
         <p:spPr>
           <a:xfrm>
-            <a:off x="8653779" y="2304450"/>
-            <a:ext cx="3187699" cy="2249099"/>
+            <a:off x="9593393" y="2407994"/>
+            <a:ext cx="2248085" cy="2042011"/>
           </a:xfrm>
           <a:prstGeom prst="rect">
             <a:avLst/>
@@ -5949,7 +6357,7 @@
                 </a:solidFill>
                 <a:latin typeface="Segoe UI"/>
               </a:rPr>
-              <a:t>ШАГ 4 · ВЫБОР ЗАДАНИЯ</a:t>
+              <a:t>ШАГ 3 · ГЛАВНОЕ МЕНЮ</a:t>
             </a:r>
           </a:p>
           <a:p>
@@ -5968,7 +6376,7 @@
                 </a:solidFill>
                 <a:latin typeface="Segoe UI"/>
               </a:rPr>
-              <a:t>Выбираем доброе дело</a:t>
+              <a:t>Ваш штаб</a:t>
             </a:r>
           </a:p>
           <a:p>
@@ -5987,7 +6395,7 @@
                 </a:solidFill>
                 <a:latin typeface="Segoe UI"/>
               </a:rPr>
-              <a:t>Задания открываются по неделям.</a:t>
+              <a:t>Отсюда доступно всё.</a:t>
             </a:r>
           </a:p>
         </p:txBody>
@@ -6029,7 +6437,7 @@
                 </a:solidFill>
                 <a:latin typeface="Segoe UI"/>
               </a:rPr>
-              <a:t>Нажмите «Задания недели» — увидите 4 дела и их стоимость.</a:t>
+              <a:t>«Задания недели» — список дел текущей недели.</a:t>
             </a:r>
           </a:p>
           <a:p>
@@ -6048,7 +6456,7 @@
                 </a:solidFill>
                 <a:latin typeface="Segoe UI"/>
               </a:rPr>
-              <a:t>Откройте любое задание кнопкой «Задание 1…4».</a:t>
+              <a:t>«Моя команда» — состав и баллы команды.</a:t>
             </a:r>
           </a:p>
           <a:p>
@@ -6067,7 +6475,7 @@
                 </a:solidFill>
                 <a:latin typeface="Segoe UI"/>
               </a:rPr>
-              <a:t>Прочитайте описание: что нужно сделать и сколько это стоит.</a:t>
+              <a:t>«Мой вклад» — что вы сдали и что зачтено.</a:t>
             </a:r>
           </a:p>
           <a:p>
@@ -6086,7 +6494,26 @@
                 </a:solidFill>
                 <a:latin typeface="Segoe UI"/>
               </a:rPr>
-              <a:t>Нажмите «Выполнил» — бот проведёт по шагам.</a:t>
+              <a:t>«Рейтинг» — таблица команд.</a:t>
+            </a:r>
+          </a:p>
+          <a:p>
+            <a:pPr algn="l">
+              <a:lnSpc>
+                <a:spcPct val="115000"/>
+              </a:lnSpc>
+              <a:spcBef>
+                <a:spcPts val="1600"/>
+              </a:spcBef>
+            </a:pPr>
+            <a:r>
+              <a:rPr sz="1700" b="0">
+                <a:solidFill>
+                  <a:srgbClr val="FFFFFF"/>
+                </a:solidFill>
+                <a:latin typeface="Segoe UI"/>
+              </a:rPr>
+              <a:t>«Правила» и «Помощь» — если что-то непонятно.</a:t>
             </a:r>
           </a:p>
         </p:txBody>
@@ -6174,14 +6601,14 @@
                 </a:solidFill>
                 <a:latin typeface="Segoe UI"/>
               </a:rPr>
-              <a:t>Если недели ещё не открыты, бот честно скажет: задания скоро будут доступны.</a:t>
+              <a:t>«Моя команда» → «Пригласить в команду» — ссылка, по которой коллега попадёт именно в вашу команду и зарегистрируется в два шага.</a:t>
             </a:r>
           </a:p>
         </p:txBody>
       </p:sp>
       <p:pic>
         <p:nvPicPr>
-          <p:cNvPr id="6" name="Picture 5" descr="07_week.png"/>
+          <p:cNvPr id="6" name="Picture 5" descr="06_menu.png"/>
           <p:cNvPicPr>
             <a:picLocks noChangeAspect="1"/>
           </p:cNvPicPr>
@@ -6195,8 +6622,8 @@
         </p:blipFill>
         <p:spPr>
           <a:xfrm>
-            <a:off x="6812280" y="1287665"/>
-            <a:ext cx="2100492" cy="4282670"/>
+            <a:off x="6812280" y="2304450"/>
+            <a:ext cx="1612899" cy="2249099"/>
           </a:xfrm>
           <a:prstGeom prst="rect">
             <a:avLst/>
@@ -6205,7 +6632,7 @@
       </p:pic>
       <p:pic>
         <p:nvPicPr>
-          <p:cNvPr id="7" name="Picture 6" descr="08_task.png"/>
+          <p:cNvPr id="7" name="Picture 6" descr="13_rating.png"/>
           <p:cNvPicPr>
             <a:picLocks noChangeAspect="1"/>
           </p:cNvPicPr>
@@ -6219,8 +6646,8 @@
         </p:blipFill>
         <p:spPr>
           <a:xfrm>
-            <a:off x="9141372" y="1287665"/>
-            <a:ext cx="2700107" cy="4282670"/>
+            <a:off x="8653779" y="2304450"/>
+            <a:ext cx="3187699" cy="2249099"/>
           </a:xfrm>
           <a:prstGeom prst="rect">
             <a:avLst/>
@@ -6290,7 +6717,7 @@
                 </a:solidFill>
                 <a:latin typeface="Segoe UI"/>
               </a:rPr>
-              <a:t>ШАГ 5 · ОТЧЁТ ПО ШАГАМ</a:t>
+              <a:t>ШАГ 4 · ВЫБОР ЗАДАНИЯ</a:t>
             </a:r>
           </a:p>
           <a:p>
@@ -6309,7 +6736,7 @@
                 </a:solidFill>
                 <a:latin typeface="Segoe UI"/>
               </a:rPr>
-              <a:t>Присылаем доказательства</a:t>
+              <a:t>Выбираем доброе дело</a:t>
             </a:r>
           </a:p>
           <a:p>
@@ -6328,7 +6755,7 @@
                 </a:solidFill>
                 <a:latin typeface="Segoe UI"/>
               </a:rPr>
-              <a:t>Каждый шаг — отдельное сообщение.</a:t>
+              <a:t>Задания открываются по неделям.</a:t>
             </a:r>
           </a:p>
         </p:txBody>
@@ -6370,7 +6797,7 @@
                 </a:solidFill>
                 <a:latin typeface="Segoe UI"/>
               </a:rPr>
-              <a:t>Бот присылает шаг: что сфотографировать или написать.</a:t>
+              <a:t>Нажмите «Задания недели» — увидите 4 дела и их стоимость.</a:t>
             </a:r>
           </a:p>
           <a:p>
@@ -6389,7 +6816,7 @@
                 </a:solidFill>
                 <a:latin typeface="Segoe UI"/>
               </a:rPr>
-              <a:t>В каждом шаге есть блок «Что должно быть видно» и «Что не подойдёт».</a:t>
+              <a:t>Откройте любое задание кнопкой «Задание 1…4».</a:t>
             </a:r>
           </a:p>
           <a:p>
@@ -6408,7 +6835,7 @@
                 </a:solidFill>
                 <a:latin typeface="Segoe UI"/>
               </a:rPr>
-              <a:t>Отправьте фото или текст ответным сообщением.</a:t>
+              <a:t>Прочитайте описание: что нужно сделать и сколько это стоит.</a:t>
             </a:r>
           </a:p>
           <a:p>
@@ -6427,26 +6854,7 @@
                 </a:solidFill>
                 <a:latin typeface="Segoe UI"/>
               </a:rPr>
-              <a:t>Бот подтвердит шаг и откроет следующий.</a:t>
-            </a:r>
-          </a:p>
-          <a:p>
-            <a:pPr algn="l">
-              <a:lnSpc>
-                <a:spcPct val="115000"/>
-              </a:lnSpc>
-              <a:spcBef>
-                <a:spcPts val="1600"/>
-              </a:spcBef>
-            </a:pPr>
-            <a:r>
-              <a:rPr sz="1700" b="0">
-                <a:solidFill>
-                  <a:srgbClr val="FFFFFF"/>
-                </a:solidFill>
-                <a:latin typeface="Segoe UI"/>
-              </a:rPr>
-              <a:t>Когда шаги закончились — нажмите «Отправить на проверку».</a:t>
+              <a:t>Нажмите «Выполнил» — бот проведёт по шагам.</a:t>
             </a:r>
           </a:p>
         </p:txBody>
@@ -6534,14 +6942,14 @@
                 </a:solidFill>
                 <a:latin typeface="Segoe UI"/>
               </a:rPr>
-              <a:t>Отчёт можно продолжить позже — бот помнит, на каком шаге вы остановились.</a:t>
+              <a:t>Если недели ещё не открыты, бот честно скажет: задания скоро будут доступны.</a:t>
             </a:r>
           </a:p>
         </p:txBody>
       </p:sp>
       <p:pic>
         <p:nvPicPr>
-          <p:cNvPr id="6" name="Picture 5" descr="09_step1.png"/>
+          <p:cNvPr id="6" name="Picture 5" descr="07_week.png"/>
           <p:cNvPicPr>
             <a:picLocks noChangeAspect="1"/>
           </p:cNvPicPr>
@@ -6555,8 +6963,8 @@
         </p:blipFill>
         <p:spPr>
           <a:xfrm>
-            <a:off x="6812280" y="1651275"/>
-            <a:ext cx="2310400" cy="3555450"/>
+            <a:off x="6812280" y="1287665"/>
+            <a:ext cx="2100492" cy="4282670"/>
           </a:xfrm>
           <a:prstGeom prst="rect">
             <a:avLst/>
@@ -6565,7 +6973,7 @@
       </p:pic>
       <p:pic>
         <p:nvPicPr>
-          <p:cNvPr id="7" name="Picture 6" descr="10_step2.png"/>
+          <p:cNvPr id="7" name="Picture 6" descr="08_task.png"/>
           <p:cNvPicPr>
             <a:picLocks noChangeAspect="1"/>
           </p:cNvPicPr>
@@ -6579,8 +6987,8 @@
         </p:blipFill>
         <p:spPr>
           <a:xfrm>
-            <a:off x="9351280" y="1651275"/>
-            <a:ext cx="2490198" cy="3555450"/>
+            <a:off x="9141372" y="1287665"/>
+            <a:ext cx="2700107" cy="4282670"/>
           </a:xfrm>
           <a:prstGeom prst="rect">
             <a:avLst/>
@@ -6650,7 +7058,7 @@
                 </a:solidFill>
                 <a:latin typeface="Segoe UI"/>
               </a:rPr>
-              <a:t>ШАГ 6 · БАЛЛЫ</a:t>
+              <a:t>ШАГ 5 · ОТЧЁТ ПО ШАГАМ</a:t>
             </a:r>
           </a:p>
           <a:p>
@@ -6669,7 +7077,7 @@
                 </a:solidFill>
                 <a:latin typeface="Segoe UI"/>
               </a:rPr>
-              <a:t>Получаем результат</a:t>
+              <a:t>Присылаем доказательства</a:t>
             </a:r>
           </a:p>
           <a:p>
@@ -6688,7 +7096,7 @@
                 </a:solidFill>
                 <a:latin typeface="Segoe UI"/>
               </a:rPr>
-              <a:t>Отчёт смотрит P&amp;C.</a:t>
+              <a:t>Каждый шаг — отдельное сообщение.</a:t>
             </a:r>
           </a:p>
         </p:txBody>
@@ -6730,7 +7138,7 @@
                 </a:solidFill>
                 <a:latin typeface="Segoe UI"/>
               </a:rPr>
-              <a:t>После отправки отчёт уходит на проверку.</a:t>
+              <a:t>Бот присылает шаг: что сфотографировать или написать.</a:t>
             </a:r>
           </a:p>
           <a:p>
@@ -6749,7 +7157,7 @@
                 </a:solidFill>
                 <a:latin typeface="Segoe UI"/>
               </a:rPr>
-              <a:t>Если всё в порядке — баллы падают вам и команде, придёт уведомление.</a:t>
+              <a:t>В каждом шаге есть блок «Что должно быть видно» и «Что не подойдёт».</a:t>
             </a:r>
           </a:p>
           <a:p>
@@ -6768,7 +7176,7 @@
                 </a:solidFill>
                 <a:latin typeface="Segoe UI"/>
               </a:rPr>
-              <a:t>Если чего-то не хватило — бот объяснит, что поправить, и можно переслать.</a:t>
+              <a:t>Отправьте фото или текст ответным сообщением.</a:t>
             </a:r>
           </a:p>
           <a:p>
@@ -6787,14 +7195,121 @@
                 </a:solidFill>
                 <a:latin typeface="Segoe UI"/>
               </a:rPr>
-              <a:t>Свои баллы всегда видно в «Мой вклад», командные — в «Рейтинге».</a:t>
+              <a:t>Бот подтвердит шаг и откроет следующий.</a:t>
+            </a:r>
+          </a:p>
+          <a:p>
+            <a:pPr algn="l">
+              <a:lnSpc>
+                <a:spcPct val="115000"/>
+              </a:lnSpc>
+              <a:spcBef>
+                <a:spcPts val="1600"/>
+              </a:spcBef>
+            </a:pPr>
+            <a:r>
+              <a:rPr sz="1700" b="0">
+                <a:solidFill>
+                  <a:srgbClr val="FFFFFF"/>
+                </a:solidFill>
+                <a:latin typeface="Segoe UI"/>
+              </a:rPr>
+              <a:t>Когда шаги закончились — нажмите «Отправить на проверку».</a:t>
+            </a:r>
+          </a:p>
+        </p:txBody>
+      </p:sp>
+      <p:sp>
+        <p:nvSpPr>
+          <p:cNvPr id="4" name="Rounded Rectangle 3"/>
+          <p:cNvSpPr/>
+          <p:nvPr/>
+        </p:nvSpPr>
+        <p:spPr>
+          <a:xfrm>
+            <a:off x="822960" y="5486400"/>
+            <a:ext cx="5669280" cy="868680"/>
+          </a:xfrm>
+          <a:prstGeom prst="roundRect">
+            <a:avLst>
+              <a:gd name="adj" fmla="val 6000"/>
+            </a:avLst>
+          </a:prstGeom>
+          <a:solidFill>
+            <a:srgbClr val="1E2C3A"/>
+          </a:solidFill>
+          <a:ln>
+            <a:noFill/>
+          </a:ln>
+          <a:effectLst/>
+        </p:spPr>
+        <p:style>
+          <a:lnRef idx="1">
+            <a:schemeClr val="accent1"/>
+          </a:lnRef>
+          <a:fillRef idx="3">
+            <a:schemeClr val="accent1"/>
+          </a:fillRef>
+          <a:effectRef idx="2">
+            <a:schemeClr val="accent1"/>
+          </a:effectRef>
+          <a:fontRef idx="minor">
+            <a:schemeClr val="lt1"/>
+          </a:fontRef>
+        </p:style>
+        <p:txBody>
+          <a:bodyPr rtlCol="0" anchor="ctr"/>
+          <a:lstStyle/>
+          <a:p>
+            <a:pPr algn="ctr"/>
+          </a:p>
+        </p:txBody>
+      </p:sp>
+      <p:sp>
+        <p:nvSpPr>
+          <p:cNvPr id="5" name="TextBox 4"/>
+          <p:cNvSpPr txBox="1"/>
+          <p:nvPr/>
+        </p:nvSpPr>
+        <p:spPr>
+          <a:xfrm>
+            <a:off x="1051560" y="5669280"/>
+            <a:ext cx="5212080" cy="640080"/>
+          </a:xfrm>
+          <a:prstGeom prst="rect">
+            <a:avLst/>
+          </a:prstGeom>
+          <a:noFill/>
+        </p:spPr>
+        <p:txBody>
+          <a:bodyPr wrap="square" lIns="0" rIns="0" tIns="0" bIns="0">
+            <a:spAutoFit/>
+          </a:bodyPr>
+          <a:lstStyle/>
+          <a:p>
+            <a:pPr algn="l">
+              <a:lnSpc>
+                <a:spcPct val="115000"/>
+              </a:lnSpc>
+              <a:spcBef>
+                <a:spcPts val="0"/>
+              </a:spcBef>
+            </a:pPr>
+            <a:r>
+              <a:rPr sz="1400" b="0">
+                <a:solidFill>
+                  <a:srgbClr val="94A7B8"/>
+                </a:solidFill>
+                <a:latin typeface="Segoe UI"/>
+              </a:rPr>
+              <a:t>Отчёт можно продолжить позже — бот помнит, на каком шаге вы остановились.</a:t>
             </a:r>
           </a:p>
         </p:txBody>
       </p:sp>
       <p:pic>
         <p:nvPicPr>
-          <p:cNvPr id="4" name="Picture 3" descr="11_ready.png"/>
+          <p:cNvPr id="6" name="Picture 5" descr="09_step1.png"/>
           <p:cNvPicPr>
             <a:picLocks noChangeAspect="1"/>
           </p:cNvPicPr>
@@ -6808,8 +7323,8 @@
         </p:blipFill>
         <p:spPr>
           <a:xfrm>
-            <a:off x="6812280" y="2317539"/>
-            <a:ext cx="1650003" cy="2222921"/>
+            <a:off x="6812280" y="1651275"/>
+            <a:ext cx="2310400" cy="3555450"/>
           </a:xfrm>
           <a:prstGeom prst="rect">
             <a:avLst/>
@@ -6818,7 +7333,7 @@
       </p:pic>
       <p:pic>
         <p:nvPicPr>
-          <p:cNvPr id="5" name="Picture 4" descr="13_rating.png"/>
+          <p:cNvPr id="7" name="Picture 6" descr="10_step2.png"/>
           <p:cNvPicPr>
             <a:picLocks noChangeAspect="1"/>
           </p:cNvPicPr>
@@ -6832,8 +7347,8 @@
         </p:blipFill>
         <p:spPr>
           <a:xfrm>
-            <a:off x="8690883" y="2317539"/>
-            <a:ext cx="3150596" cy="2222921"/>
+            <a:off x="9351280" y="1651275"/>
+            <a:ext cx="2490198" cy="3555450"/>
           </a:xfrm>
           <a:prstGeom prst="rect">
             <a:avLst/>
